--- a/material/Python/15_예외처리.pptx
+++ b/material/Python/15_예외처리.pptx
@@ -1,6 +1,6 @@
 
 <file path=ppt/presentation.xml><?xml version="1.0" encoding="utf-8"?>
-<p:presentation xmlns:a="http://schemas.openxmlformats.org/drawingml/2006/main" xmlns:r="http://schemas.openxmlformats.org/officeDocument/2006/relationships" xmlns:p="http://schemas.openxmlformats.org/presentationml/2006/main" saveSubsetFonts="1">
+<p:presentation xmlns:a="http://schemas.openxmlformats.org/drawingml/2006/main" xmlns:r="http://schemas.openxmlformats.org/officeDocument/2006/relationships" xmlns:p="http://schemas.openxmlformats.org/presentationml/2006/main" embedTrueTypeFonts="1" saveSubsetFonts="1">
   <p:sldMasterIdLst>
     <p:sldMasterId id="2147483660" r:id="rId1"/>
   </p:sldMasterIdLst>
@@ -27,6 +27,34 @@
   </p:sldIdLst>
   <p:sldSz cx="12192000" cy="6858000"/>
   <p:notesSz cx="6858000" cy="9144000"/>
+  <p:embeddedFontLst>
+    <p:embeddedFont>
+      <p:font typeface="G마켓 산스 TTF Bold" panose="02000000000000000000" pitchFamily="2" charset="-127"/>
+      <p:bold r:id="rId19"/>
+    </p:embeddedFont>
+    <p:embeddedFont>
+      <p:font typeface="Pretendard Black" panose="02000A03000000020004" pitchFamily="2" charset="-127"/>
+      <p:bold r:id="rId20"/>
+    </p:embeddedFont>
+    <p:embeddedFont>
+      <p:font typeface="Pretendard Light" panose="02000403000000020004" pitchFamily="2" charset="-127"/>
+      <p:regular r:id="rId21"/>
+    </p:embeddedFont>
+    <p:embeddedFont>
+      <p:font typeface="Pretendard Medium" panose="02000603000000020004" pitchFamily="2" charset="-127"/>
+      <p:regular r:id="rId22"/>
+    </p:embeddedFont>
+    <p:embeddedFont>
+      <p:font typeface="맑은 고딕" panose="020B0503020000020004" pitchFamily="50" charset="-127"/>
+      <p:regular r:id="rId23"/>
+      <p:bold r:id="rId24"/>
+    </p:embeddedFont>
+    <p:embeddedFont>
+      <p:font typeface="메이플스토리" panose="02000300000000000000" pitchFamily="2" charset="-127"/>
+      <p:regular r:id="rId25"/>
+      <p:bold r:id="rId26"/>
+    </p:embeddedFont>
+  </p:embeddedFontLst>
   <p:defaultTextStyle>
     <a:defPPr>
       <a:defRPr lang="ko-KR"/>
@@ -233,7 +261,7 @@
             <a:fld id="{A13A867C-D490-40C2-AB8D-A60FA70A9BF5}" type="datetimeFigureOut">
               <a:rPr lang="ko-KR" altLang="en-US" smtClean="0"/>
               <a:pPr/>
-              <a:t>2025-07-30</a:t>
+              <a:t>2025-08-21</a:t>
             </a:fld>
             <a:endParaRPr lang="ko-KR" altLang="en-US" dirty="0"/>
           </a:p>
@@ -948,7 +976,7 @@
           <a:p>
             <a:fld id="{442BEE3F-2E9A-4FD8-8B8A-8619F3E161C0}" type="datetime1">
               <a:rPr lang="ko-KR" altLang="en-US" smtClean="0"/>
-              <a:t>2025-07-30</a:t>
+              <a:t>2025-08-21</a:t>
             </a:fld>
             <a:endParaRPr lang="ko-KR" altLang="en-US"/>
           </a:p>
@@ -1235,7 +1263,7 @@
           <a:p>
             <a:fld id="{0F78D9C4-20C1-4B15-A116-16DC77AD9A1E}" type="datetime1">
               <a:rPr lang="ko-KR" altLang="en-US" smtClean="0"/>
-              <a:t>2025-07-30</a:t>
+              <a:t>2025-08-21</a:t>
             </a:fld>
             <a:endParaRPr lang="ko-KR" altLang="en-US"/>
           </a:p>
@@ -1410,7 +1438,7 @@
           <a:p>
             <a:fld id="{7F5E23C3-0E3D-4E4E-8486-D7FB4C073DC1}" type="datetime1">
               <a:rPr lang="ko-KR" altLang="en-US" smtClean="0"/>
-              <a:t>2025-07-30</a:t>
+              <a:t>2025-08-21</a:t>
             </a:fld>
             <a:endParaRPr lang="ko-KR" altLang="en-US"/>
           </a:p>
@@ -1822,7 +1850,7 @@
           <a:p>
             <a:fld id="{051A8C49-CED7-4A86-9B4A-621D7F62EE92}" type="datetime1">
               <a:rPr lang="ko-KR" altLang="en-US" smtClean="0"/>
-              <a:t>2025-07-30</a:t>
+              <a:t>2025-08-21</a:t>
             </a:fld>
             <a:endParaRPr lang="ko-KR" altLang="en-US"/>
           </a:p>
@@ -2151,7 +2179,7 @@
           <a:p>
             <a:fld id="{7F5E23C3-0E3D-4E4E-8486-D7FB4C073DC1}" type="datetime1">
               <a:rPr lang="ko-KR" altLang="en-US" smtClean="0"/>
-              <a:t>2025-07-30</a:t>
+              <a:t>2025-08-21</a:t>
             </a:fld>
             <a:endParaRPr lang="ko-KR" altLang="en-US"/>
           </a:p>
@@ -2995,7 +3023,7 @@
           <a:p>
             <a:fld id="{0F78D9C4-20C1-4B15-A116-16DC77AD9A1E}" type="datetime1">
               <a:rPr lang="ko-KR" altLang="en-US" smtClean="0"/>
-              <a:t>2025-07-30</a:t>
+              <a:t>2025-08-21</a:t>
             </a:fld>
             <a:endParaRPr lang="ko-KR" altLang="en-US"/>
           </a:p>
@@ -3250,7 +3278,7 @@
           <a:p>
             <a:fld id="{0F78D9C4-20C1-4B15-A116-16DC77AD9A1E}" type="datetime1">
               <a:rPr lang="ko-KR" altLang="en-US" smtClean="0"/>
-              <a:t>2025-07-30</a:t>
+              <a:t>2025-08-21</a:t>
             </a:fld>
             <a:endParaRPr lang="ko-KR" altLang="en-US"/>
           </a:p>
@@ -3552,7 +3580,7 @@
           <a:p>
             <a:fld id="{0F78D9C4-20C1-4B15-A116-16DC77AD9A1E}" type="datetime1">
               <a:rPr lang="ko-KR" altLang="en-US" smtClean="0"/>
-              <a:t>2025-07-30</a:t>
+              <a:t>2025-08-21</a:t>
             </a:fld>
             <a:endParaRPr lang="ko-KR" altLang="en-US"/>
           </a:p>
@@ -3807,7 +3835,7 @@
           <a:p>
             <a:fld id="{0F78D9C4-20C1-4B15-A116-16DC77AD9A1E}" type="datetime1">
               <a:rPr lang="ko-KR" altLang="en-US" smtClean="0"/>
-              <a:t>2025-07-30</a:t>
+              <a:t>2025-08-21</a:t>
             </a:fld>
             <a:endParaRPr lang="ko-KR" altLang="en-US"/>
           </a:p>
@@ -4094,7 +4122,7 @@
           <a:p>
             <a:fld id="{0F78D9C4-20C1-4B15-A116-16DC77AD9A1E}" type="datetime1">
               <a:rPr lang="ko-KR" altLang="en-US" smtClean="0"/>
-              <a:t>2025-07-30</a:t>
+              <a:t>2025-08-21</a:t>
             </a:fld>
             <a:endParaRPr lang="ko-KR" altLang="en-US"/>
           </a:p>
@@ -4897,7 +4925,7 @@
           <a:p>
             <a:fld id="{0F78D9C4-20C1-4B15-A116-16DC77AD9A1E}" type="datetime1">
               <a:rPr lang="ko-KR" altLang="en-US" smtClean="0"/>
-              <a:t>2025-07-30</a:t>
+              <a:t>2025-08-21</a:t>
             </a:fld>
             <a:endParaRPr lang="ko-KR" altLang="en-US"/>
           </a:p>
@@ -5433,7 +5461,7 @@
           <a:p>
             <a:fld id="{0F78D9C4-20C1-4B15-A116-16DC77AD9A1E}" type="datetime1">
               <a:rPr lang="ko-KR" altLang="en-US" smtClean="0"/>
-              <a:t>2025-07-30</a:t>
+              <a:t>2025-08-21</a:t>
             </a:fld>
             <a:endParaRPr lang="ko-KR" altLang="en-US"/>
           </a:p>
@@ -5673,7 +5701,7 @@
           <a:p>
             <a:fld id="{0F78D9C4-20C1-4B15-A116-16DC77AD9A1E}" type="datetime1">
               <a:rPr lang="ko-KR" altLang="en-US" smtClean="0"/>
-              <a:t>2025-07-30</a:t>
+              <a:t>2025-08-21</a:t>
             </a:fld>
             <a:endParaRPr lang="ko-KR" altLang="en-US"/>
           </a:p>
@@ -5708,36 +5736,6 @@
           </a:p>
         </p:txBody>
       </p:sp>
-      <p:pic>
-        <p:nvPicPr>
-          <p:cNvPr id="10" name="그림 9">
-            <a:extLst>
-              <a:ext uri="{FF2B5EF4-FFF2-40B4-BE49-F238E27FC236}">
-                <a16:creationId xmlns:a16="http://schemas.microsoft.com/office/drawing/2014/main" id="{E5E783BF-5CBA-DD4F-0788-6FA67F39CB69}"/>
-              </a:ext>
-            </a:extLst>
-          </p:cNvPr>
-          <p:cNvPicPr>
-            <a:picLocks noChangeAspect="1"/>
-          </p:cNvPicPr>
-          <p:nvPr/>
-        </p:nvPicPr>
-        <p:blipFill>
-          <a:blip r:embed="rId3"/>
-          <a:stretch>
-            <a:fillRect/>
-          </a:stretch>
-        </p:blipFill>
-        <p:spPr>
-          <a:xfrm>
-            <a:off x="17507873" y="982969"/>
-            <a:ext cx="4438844" cy="3116313"/>
-          </a:xfrm>
-          <a:prstGeom prst="rect">
-            <a:avLst/>
-          </a:prstGeom>
-        </p:spPr>
-      </p:pic>
     </p:spTree>
     <p:extLst>
       <p:ext uri="{BB962C8B-B14F-4D97-AF65-F5344CB8AC3E}">
@@ -5820,7 +5818,7 @@
           <a:p>
             <a:fld id="{0F78D9C4-20C1-4B15-A116-16DC77AD9A1E}" type="datetime1">
               <a:rPr lang="ko-KR" altLang="en-US" smtClean="0"/>
-              <a:t>2025-07-30</a:t>
+              <a:t>2025-08-21</a:t>
             </a:fld>
             <a:endParaRPr lang="ko-KR" altLang="en-US"/>
           </a:p>
@@ -6345,7 +6343,7 @@
           <a:p>
             <a:fld id="{0F78D9C4-20C1-4B15-A116-16DC77AD9A1E}" type="datetime1">
               <a:rPr lang="ko-KR" altLang="en-US" smtClean="0"/>
-              <a:t>2025-07-30</a:t>
+              <a:t>2025-08-21</a:t>
             </a:fld>
             <a:endParaRPr lang="ko-KR" altLang="en-US"/>
           </a:p>
@@ -6629,7 +6627,7 @@
           <a:p>
             <a:fld id="{0F78D9C4-20C1-4B15-A116-16DC77AD9A1E}" type="datetime1">
               <a:rPr lang="ko-KR" altLang="en-US" smtClean="0"/>
-              <a:t>2025-07-30</a:t>
+              <a:t>2025-08-21</a:t>
             </a:fld>
             <a:endParaRPr lang="ko-KR" altLang="en-US"/>
           </a:p>
@@ -6900,7 +6898,7 @@
           <a:p>
             <a:fld id="{0F78D9C4-20C1-4B15-A116-16DC77AD9A1E}" type="datetime1">
               <a:rPr lang="ko-KR" altLang="en-US" smtClean="0"/>
-              <a:t>2025-07-30</a:t>
+              <a:t>2025-08-21</a:t>
             </a:fld>
             <a:endParaRPr lang="ko-KR" altLang="en-US"/>
           </a:p>
